--- a/media/resources/files/Onduktardyn_Orunduk_Maanisi_Jalgyz_Suroo_3h9K96F.pptx
+++ b/media/resources/files/Onduktardyn_Orunduk_Maanisi_Jalgyz_Suroo_3h9K96F.pptx
@@ -2121,7 +2121,7 @@
                 <a:ea typeface="+mn-ea"/>
                 <a:cs typeface="+mn-cs"/>
               </a:rPr>
-              <a:t>Турдуу пикирлер учун ыраазычылык билдиребиз.</a:t>
+              <a:t>Түрдүү пикирлер үчүн ыраазычылык билдиребиз.</a:t>
             </a:r>
           </a:p>
           <a:p>

--- a/media/resources/files/Onduktardyn_Orunduk_Maanisi_Jalgyz_Suroo_3h9K96F.pptx
+++ b/media/resources/files/Onduktardyn_Orunduk_Maanisi_Jalgyz_Suroo_3h9K96F.pptx
@@ -1344,7 +1344,7 @@
             <a:pPr algn="ctr"/>
             <a:r>
               <a:rPr lang="ky-KG" sz="4800" dirty="0"/>
-              <a:t>4.5183 </a:t>
+              <a:t>4,5183 </a:t>
             </a:r>
           </a:p>
           <a:p>
